--- a/L8-reducing-emissions.pptx
+++ b/L8-reducing-emissions.pptx
@@ -25,9 +25,10 @@
     <p:sldId id="270" r:id="rId19"/>
     <p:sldId id="273" r:id="rId20"/>
     <p:sldId id="274" r:id="rId21"/>
-    <p:sldId id="275" r:id="rId22"/>
-    <p:sldId id="276" r:id="rId23"/>
-    <p:sldId id="257" r:id="rId24"/>
+    <p:sldId id="1703" r:id="rId22"/>
+    <p:sldId id="275" r:id="rId23"/>
+    <p:sldId id="276" r:id="rId24"/>
+    <p:sldId id="257" r:id="rId25"/>
   </p:sldIdLst>
   <p:sldSz cx="12192000" cy="6858000"/>
   <p:notesSz cx="6858000" cy="9144000"/>
@@ -137,7 +138,7 @@
 <file path=ppt/revisionInfo.xml><?xml version="1.0" encoding="utf-8"?>
 <p1510:revInfo xmlns:a="http://schemas.openxmlformats.org/drawingml/2006/main" xmlns:r="http://schemas.openxmlformats.org/officeDocument/2006/relationships" xmlns:p1510="http://schemas.microsoft.com/office/powerpoint/2015/10/main">
   <p1510:revLst>
-    <p1510:client id="{B040566D-8CF8-C54D-9532-E29B88D8DE57}" v="1" dt="2026-02-04T08:22:19.251"/>
+    <p1510:client id="{469EB383-37FF-D240-AA45-FFB279BE0B51}" v="1" dt="2026-10-01T19:10:49.482"/>
   </p1510:revLst>
 </p1510:revInfo>
 </file>
@@ -146,70 +147,25 @@
 <pc:chgInfo xmlns:a="http://schemas.openxmlformats.org/drawingml/2006/main" xmlns:r="http://schemas.openxmlformats.org/officeDocument/2006/relationships" xmlns:ac="http://schemas.microsoft.com/office/drawing/2013/main/command" xmlns:pc="http://schemas.microsoft.com/office/powerpoint/2013/main/command">
   <pc:docChgLst>
     <pc:chgData name="Andrew Turner" userId="9b60647a-c825-4266-aafa-670849c64782" providerId="ADAL" clId="{292526B5-234E-5EAA-AFB8-0412B8CA4453}"/>
-    <pc:docChg chg="custSel modSld modMainMaster">
-      <pc:chgData name="Andrew Turner" userId="9b60647a-c825-4266-aafa-670849c64782" providerId="ADAL" clId="{292526B5-234E-5EAA-AFB8-0412B8CA4453}" dt="2026-02-04T08:28:42.438" v="21" actId="1035"/>
+    <pc:docChg chg="custSel addSld modSld modMainMaster">
+      <pc:chgData name="Andrew Turner" userId="9b60647a-c825-4266-aafa-670849c64782" providerId="ADAL" clId="{292526B5-234E-5EAA-AFB8-0412B8CA4453}" dt="2026-10-01T19:11:49.338" v="29" actId="20577"/>
       <pc:docMkLst>
         <pc:docMk/>
       </pc:docMkLst>
-      <pc:sldChg chg="modSp mod">
-        <pc:chgData name="Andrew Turner" userId="9b60647a-c825-4266-aafa-670849c64782" providerId="ADAL" clId="{292526B5-234E-5EAA-AFB8-0412B8CA4453}" dt="2026-02-04T08:21:35.833" v="2" actId="20577"/>
+      <pc:sldChg chg="modSp add mod">
+        <pc:chgData name="Andrew Turner" userId="9b60647a-c825-4266-aafa-670849c64782" providerId="ADAL" clId="{292526B5-234E-5EAA-AFB8-0412B8CA4453}" dt="2026-10-01T19:11:49.338" v="29" actId="20577"/>
         <pc:sldMkLst>
           <pc:docMk/>
-          <pc:sldMk cId="3791389032" sldId="260"/>
+          <pc:sldMk cId="2816786044" sldId="1703"/>
         </pc:sldMkLst>
-        <pc:spChg chg="mod">
-          <ac:chgData name="Andrew Turner" userId="9b60647a-c825-4266-aafa-670849c64782" providerId="ADAL" clId="{292526B5-234E-5EAA-AFB8-0412B8CA4453}" dt="2026-02-04T08:21:35.833" v="2" actId="20577"/>
-          <ac:spMkLst>
+        <pc:graphicFrameChg chg="modGraphic">
+          <ac:chgData name="Andrew Turner" userId="9b60647a-c825-4266-aafa-670849c64782" providerId="ADAL" clId="{292526B5-234E-5EAA-AFB8-0412B8CA4453}" dt="2026-10-01T19:11:49.338" v="29" actId="20577"/>
+          <ac:graphicFrameMkLst>
             <pc:docMk/>
-            <pc:sldMk cId="3791389032" sldId="260"/>
-            <ac:spMk id="3" creationId="{10B11D3D-59E9-8B36-6C4E-DBF6E534A449}"/>
-          </ac:spMkLst>
-        </pc:spChg>
-      </pc:sldChg>
-      <pc:sldChg chg="modSp mod">
-        <pc:chgData name="Andrew Turner" userId="9b60647a-c825-4266-aafa-670849c64782" providerId="ADAL" clId="{292526B5-234E-5EAA-AFB8-0412B8CA4453}" dt="2026-02-04T08:22:22.327" v="6" actId="20577"/>
-        <pc:sldMkLst>
-          <pc:docMk/>
-          <pc:sldMk cId="656932682" sldId="261"/>
-        </pc:sldMkLst>
-        <pc:spChg chg="mod">
-          <ac:chgData name="Andrew Turner" userId="9b60647a-c825-4266-aafa-670849c64782" providerId="ADAL" clId="{292526B5-234E-5EAA-AFB8-0412B8CA4453}" dt="2026-02-04T08:22:22.327" v="6" actId="20577"/>
-          <ac:spMkLst>
-            <pc:docMk/>
-            <pc:sldMk cId="656932682" sldId="261"/>
-            <ac:spMk id="3" creationId="{2B4E3EFA-0D3E-3AEB-03F8-59B138FA5BBC}"/>
-          </ac:spMkLst>
-        </pc:spChg>
-      </pc:sldChg>
-      <pc:sldChg chg="modSp mod">
-        <pc:chgData name="Andrew Turner" userId="9b60647a-c825-4266-aafa-670849c64782" providerId="ADAL" clId="{292526B5-234E-5EAA-AFB8-0412B8CA4453}" dt="2026-02-04T08:28:23.051" v="7" actId="20577"/>
-        <pc:sldMkLst>
-          <pc:docMk/>
-          <pc:sldMk cId="3941669629" sldId="272"/>
-        </pc:sldMkLst>
-        <pc:spChg chg="mod">
-          <ac:chgData name="Andrew Turner" userId="9b60647a-c825-4266-aafa-670849c64782" providerId="ADAL" clId="{292526B5-234E-5EAA-AFB8-0412B8CA4453}" dt="2026-02-04T08:28:23.051" v="7" actId="20577"/>
-          <ac:spMkLst>
-            <pc:docMk/>
-            <pc:sldMk cId="3941669629" sldId="272"/>
-            <ac:spMk id="3" creationId="{B033ABD3-5676-F2B4-B06E-594BC9F5CCAD}"/>
-          </ac:spMkLst>
-        </pc:spChg>
-      </pc:sldChg>
-      <pc:sldChg chg="modSp mod">
-        <pc:chgData name="Andrew Turner" userId="9b60647a-c825-4266-aafa-670849c64782" providerId="ADAL" clId="{292526B5-234E-5EAA-AFB8-0412B8CA4453}" dt="2026-02-04T08:28:42.438" v="21" actId="1035"/>
-        <pc:sldMkLst>
-          <pc:docMk/>
-          <pc:sldMk cId="2909949448" sldId="276"/>
-        </pc:sldMkLst>
-        <pc:spChg chg="mod">
-          <ac:chgData name="Andrew Turner" userId="9b60647a-c825-4266-aafa-670849c64782" providerId="ADAL" clId="{292526B5-234E-5EAA-AFB8-0412B8CA4453}" dt="2026-02-04T08:28:42.438" v="21" actId="1035"/>
-          <ac:spMkLst>
-            <pc:docMk/>
-            <pc:sldMk cId="2909949448" sldId="276"/>
-            <ac:spMk id="4" creationId="{9C38E8B8-24BD-318F-5B03-09F0407E02D5}"/>
-          </ac:spMkLst>
-        </pc:spChg>
+            <pc:sldMk cId="2816786044" sldId="1703"/>
+            <ac:graphicFrameMk id="6" creationId="{CC9ED452-CB2F-048C-E62B-E0D2D17B5474}"/>
+          </ac:graphicFrameMkLst>
+        </pc:graphicFrameChg>
       </pc:sldChg>
     </pc:docChg>
   </pc:docChgLst>
@@ -363,7 +319,7 @@
           <a:p>
             <a:fld id="{401BCBAA-4F76-C245-9463-A5D066D6963D}" type="datetimeFigureOut">
               <a:rPr lang="en-GB" smtClean="0"/>
-              <a:t>03/02/2026</a:t>
+              <a:t>01/10/2026</a:t>
             </a:fld>
             <a:endParaRPr lang="en-GB"/>
           </a:p>
@@ -561,7 +517,7 @@
           <a:p>
             <a:fld id="{401BCBAA-4F76-C245-9463-A5D066D6963D}" type="datetimeFigureOut">
               <a:rPr lang="en-GB" smtClean="0"/>
-              <a:t>03/02/2026</a:t>
+              <a:t>01/10/2026</a:t>
             </a:fld>
             <a:endParaRPr lang="en-GB"/>
           </a:p>
@@ -769,7 +725,7 @@
           <a:p>
             <a:fld id="{401BCBAA-4F76-C245-9463-A5D066D6963D}" type="datetimeFigureOut">
               <a:rPr lang="en-GB" smtClean="0"/>
-              <a:t>03/02/2026</a:t>
+              <a:t>01/10/2026</a:t>
             </a:fld>
             <a:endParaRPr lang="en-GB"/>
           </a:p>
@@ -967,7 +923,7 @@
           <a:p>
             <a:fld id="{401BCBAA-4F76-C245-9463-A5D066D6963D}" type="datetimeFigureOut">
               <a:rPr lang="en-GB" smtClean="0"/>
-              <a:t>03/02/2026</a:t>
+              <a:t>01/10/2026</a:t>
             </a:fld>
             <a:endParaRPr lang="en-GB"/>
           </a:p>
@@ -1242,7 +1198,7 @@
           <a:p>
             <a:fld id="{401BCBAA-4F76-C245-9463-A5D066D6963D}" type="datetimeFigureOut">
               <a:rPr lang="en-GB" smtClean="0"/>
-              <a:t>03/02/2026</a:t>
+              <a:t>01/10/2026</a:t>
             </a:fld>
             <a:endParaRPr lang="en-GB"/>
           </a:p>
@@ -1507,7 +1463,7 @@
           <a:p>
             <a:fld id="{401BCBAA-4F76-C245-9463-A5D066D6963D}" type="datetimeFigureOut">
               <a:rPr lang="en-GB" smtClean="0"/>
-              <a:t>03/02/2026</a:t>
+              <a:t>01/10/2026</a:t>
             </a:fld>
             <a:endParaRPr lang="en-GB"/>
           </a:p>
@@ -1919,7 +1875,7 @@
           <a:p>
             <a:fld id="{401BCBAA-4F76-C245-9463-A5D066D6963D}" type="datetimeFigureOut">
               <a:rPr lang="en-GB" smtClean="0"/>
-              <a:t>03/02/2026</a:t>
+              <a:t>01/10/2026</a:t>
             </a:fld>
             <a:endParaRPr lang="en-GB"/>
           </a:p>
@@ -2060,7 +2016,7 @@
           <a:p>
             <a:fld id="{401BCBAA-4F76-C245-9463-A5D066D6963D}" type="datetimeFigureOut">
               <a:rPr lang="en-GB" smtClean="0"/>
-              <a:t>03/02/2026</a:t>
+              <a:t>01/10/2026</a:t>
             </a:fld>
             <a:endParaRPr lang="en-GB"/>
           </a:p>
@@ -2173,7 +2129,7 @@
           <a:p>
             <a:fld id="{401BCBAA-4F76-C245-9463-A5D066D6963D}" type="datetimeFigureOut">
               <a:rPr lang="en-GB" smtClean="0"/>
-              <a:t>03/02/2026</a:t>
+              <a:t>01/10/2026</a:t>
             </a:fld>
             <a:endParaRPr lang="en-GB"/>
           </a:p>
@@ -2484,7 +2440,7 @@
           <a:p>
             <a:fld id="{401BCBAA-4F76-C245-9463-A5D066D6963D}" type="datetimeFigureOut">
               <a:rPr lang="en-GB" smtClean="0"/>
-              <a:t>03/02/2026</a:t>
+              <a:t>01/10/2026</a:t>
             </a:fld>
             <a:endParaRPr lang="en-GB"/>
           </a:p>
@@ -2772,7 +2728,7 @@
           <a:p>
             <a:fld id="{401BCBAA-4F76-C245-9463-A5D066D6963D}" type="datetimeFigureOut">
               <a:rPr lang="en-GB" smtClean="0"/>
-              <a:t>03/02/2026</a:t>
+              <a:t>01/10/2026</a:t>
             </a:fld>
             <a:endParaRPr lang="en-GB"/>
           </a:p>
@@ -3016,7 +2972,7 @@
           <a:p>
             <a:fld id="{401BCBAA-4F76-C245-9463-A5D066D6963D}" type="datetimeFigureOut">
               <a:rPr lang="en-GB" smtClean="0"/>
-              <a:t>03/02/2026</a:t>
+              <a:t>01/10/2026</a:t>
             </a:fld>
             <a:endParaRPr lang="en-GB"/>
           </a:p>
@@ -5017,6 +4973,1754 @@
           <a:chExt cx="0" cy="0"/>
         </a:xfrm>
       </p:grpSpPr>
+      <p:graphicFrame>
+        <p:nvGraphicFramePr>
+          <p:cNvPr id="6" name="Content Placeholder 5">
+            <a:extLst>
+              <a:ext uri="{FF2B5EF4-FFF2-40B4-BE49-F238E27FC236}">
+                <a16:creationId xmlns:a16="http://schemas.microsoft.com/office/drawing/2014/main" id="{CC9ED452-CB2F-048C-E62B-E0D2D17B5474}"/>
+              </a:ext>
+            </a:extLst>
+          </p:cNvPr>
+          <p:cNvGraphicFramePr>
+            <a:graphicFrameLocks noGrp="1"/>
+          </p:cNvGraphicFramePr>
+          <p:nvPr>
+            <p:ph idx="1"/>
+            <p:extLst>
+              <p:ext uri="{D42A27DB-BD31-4B8C-83A1-F6EECF244321}">
+                <p14:modId xmlns:p14="http://schemas.microsoft.com/office/powerpoint/2010/main" val="4142207990"/>
+              </p:ext>
+            </p:extLst>
+          </p:nvPr>
+        </p:nvGraphicFramePr>
+        <p:xfrm>
+          <a:off x="228600" y="294676"/>
+          <a:ext cx="11739282" cy="6232616"/>
+        </p:xfrm>
+        <a:graphic>
+          <a:graphicData uri="http://schemas.openxmlformats.org/drawingml/2006/table">
+            <a:tbl>
+              <a:tblPr firstRow="1" bandRow="1">
+                <a:tableStyleId>{5C22544A-7EE6-4342-B048-85BDC9FD1C3A}</a:tableStyleId>
+              </a:tblPr>
+              <a:tblGrid>
+                <a:gridCol w="2066635">
+                  <a:extLst>
+                    <a:ext uri="{9D8B030D-6E8A-4147-A177-3AD203B41FA5}">
+                      <a16:colId xmlns:a16="http://schemas.microsoft.com/office/drawing/2014/main" val="2121875260"/>
+                    </a:ext>
+                  </a:extLst>
+                </a:gridCol>
+                <a:gridCol w="4608645">
+                  <a:extLst>
+                    <a:ext uri="{9D8B030D-6E8A-4147-A177-3AD203B41FA5}">
+                      <a16:colId xmlns:a16="http://schemas.microsoft.com/office/drawing/2014/main" val="14040296"/>
+                    </a:ext>
+                  </a:extLst>
+                </a:gridCol>
+                <a:gridCol w="5064002">
+                  <a:extLst>
+                    <a:ext uri="{9D8B030D-6E8A-4147-A177-3AD203B41FA5}">
+                      <a16:colId xmlns:a16="http://schemas.microsoft.com/office/drawing/2014/main" val="362389885"/>
+                    </a:ext>
+                  </a:extLst>
+                </a:gridCol>
+              </a:tblGrid>
+              <a:tr h="373108">
+                <a:tc>
+                  <a:txBody>
+                    <a:bodyPr/>
+                    <a:lstStyle/>
+                    <a:p>
+                      <a:endParaRPr lang="en-GB" sz="1800" dirty="0">
+                        <a:latin typeface="Helvetica" pitchFamily="2" charset="0"/>
+                      </a:endParaRPr>
+                    </a:p>
+                  </a:txBody>
+                  <a:tcPr>
+                    <a:lnL w="12700" cap="flat" cmpd="sng" algn="ctr">
+                      <a:solidFill>
+                        <a:schemeClr val="tx1"/>
+                      </a:solidFill>
+                      <a:prstDash val="solid"/>
+                      <a:round/>
+                      <a:headEnd type="none" w="med" len="med"/>
+                      <a:tailEnd type="none" w="med" len="med"/>
+                    </a:lnL>
+                    <a:lnR w="12700" cap="flat" cmpd="sng" algn="ctr">
+                      <a:solidFill>
+                        <a:schemeClr val="tx1"/>
+                      </a:solidFill>
+                      <a:prstDash val="solid"/>
+                      <a:round/>
+                      <a:headEnd type="none" w="med" len="med"/>
+                      <a:tailEnd type="none" w="med" len="med"/>
+                    </a:lnR>
+                    <a:lnT w="12700" cap="flat" cmpd="sng" algn="ctr">
+                      <a:solidFill>
+                        <a:schemeClr val="tx1"/>
+                      </a:solidFill>
+                      <a:prstDash val="solid"/>
+                      <a:round/>
+                      <a:headEnd type="none" w="med" len="med"/>
+                      <a:tailEnd type="none" w="med" len="med"/>
+                    </a:lnT>
+                    <a:lnB w="12700" cap="flat" cmpd="sng" algn="ctr">
+                      <a:solidFill>
+                        <a:schemeClr val="tx1"/>
+                      </a:solidFill>
+                      <a:prstDash val="solid"/>
+                      <a:round/>
+                      <a:headEnd type="none" w="med" len="med"/>
+                      <a:tailEnd type="none" w="med" len="med"/>
+                    </a:lnB>
+                    <a:lnTlToBr w="12700" cmpd="sng">
+                      <a:noFill/>
+                      <a:prstDash val="solid"/>
+                    </a:lnTlToBr>
+                    <a:lnBlToTr w="12700" cmpd="sng">
+                      <a:noFill/>
+                      <a:prstDash val="solid"/>
+                    </a:lnBlToTr>
+                    <a:solidFill>
+                      <a:schemeClr val="tx1">
+                        <a:lumMod val="50000"/>
+                        <a:lumOff val="50000"/>
+                      </a:schemeClr>
+                    </a:solidFill>
+                  </a:tcPr>
+                </a:tc>
+                <a:tc>
+                  <a:txBody>
+                    <a:bodyPr/>
+                    <a:lstStyle/>
+                    <a:p>
+                      <a:r>
+                        <a:rPr lang="en-GB" sz="1800" dirty="0">
+                          <a:latin typeface="Helvetica" pitchFamily="2" charset="0"/>
+                        </a:rPr>
+                        <a:t>Embodied emissions dominate</a:t>
+                      </a:r>
+                    </a:p>
+                  </a:txBody>
+                  <a:tcPr>
+                    <a:lnL w="12700" cap="flat" cmpd="sng" algn="ctr">
+                      <a:solidFill>
+                        <a:schemeClr val="tx1"/>
+                      </a:solidFill>
+                      <a:prstDash val="solid"/>
+                      <a:round/>
+                      <a:headEnd type="none" w="med" len="med"/>
+                      <a:tailEnd type="none" w="med" len="med"/>
+                    </a:lnL>
+                    <a:lnR w="12700" cap="flat" cmpd="sng" algn="ctr">
+                      <a:solidFill>
+                        <a:schemeClr val="tx1"/>
+                      </a:solidFill>
+                      <a:prstDash val="solid"/>
+                      <a:round/>
+                      <a:headEnd type="none" w="med" len="med"/>
+                      <a:tailEnd type="none" w="med" len="med"/>
+                    </a:lnR>
+                    <a:lnT w="12700" cap="flat" cmpd="sng" algn="ctr">
+                      <a:solidFill>
+                        <a:schemeClr val="tx1"/>
+                      </a:solidFill>
+                      <a:prstDash val="solid"/>
+                      <a:round/>
+                      <a:headEnd type="none" w="med" len="med"/>
+                      <a:tailEnd type="none" w="med" len="med"/>
+                    </a:lnT>
+                    <a:lnB w="12700" cap="flat" cmpd="sng" algn="ctr">
+                      <a:solidFill>
+                        <a:schemeClr val="tx1"/>
+                      </a:solidFill>
+                      <a:prstDash val="solid"/>
+                      <a:round/>
+                      <a:headEnd type="none" w="med" len="med"/>
+                      <a:tailEnd type="none" w="med" len="med"/>
+                    </a:lnB>
+                    <a:lnTlToBr w="12700" cmpd="sng">
+                      <a:noFill/>
+                      <a:prstDash val="solid"/>
+                    </a:lnTlToBr>
+                    <a:lnBlToTr w="12700" cmpd="sng">
+                      <a:noFill/>
+                      <a:prstDash val="solid"/>
+                    </a:lnBlToTr>
+                    <a:solidFill>
+                      <a:schemeClr val="tx1">
+                        <a:lumMod val="50000"/>
+                        <a:lumOff val="50000"/>
+                      </a:schemeClr>
+                    </a:solidFill>
+                  </a:tcPr>
+                </a:tc>
+                <a:tc>
+                  <a:txBody>
+                    <a:bodyPr/>
+                    <a:lstStyle/>
+                    <a:p>
+                      <a:r>
+                        <a:rPr lang="en-GB" sz="1800" dirty="0">
+                          <a:latin typeface="Helvetica" pitchFamily="2" charset="0"/>
+                        </a:rPr>
+                        <a:t>Operational emissions dominate</a:t>
+                      </a:r>
+                    </a:p>
+                  </a:txBody>
+                  <a:tcPr>
+                    <a:lnL w="12700" cap="flat" cmpd="sng" algn="ctr">
+                      <a:solidFill>
+                        <a:schemeClr val="tx1"/>
+                      </a:solidFill>
+                      <a:prstDash val="solid"/>
+                      <a:round/>
+                      <a:headEnd type="none" w="med" len="med"/>
+                      <a:tailEnd type="none" w="med" len="med"/>
+                    </a:lnL>
+                    <a:lnR w="12700" cap="flat" cmpd="sng" algn="ctr">
+                      <a:solidFill>
+                        <a:schemeClr val="tx1"/>
+                      </a:solidFill>
+                      <a:prstDash val="solid"/>
+                      <a:round/>
+                      <a:headEnd type="none" w="med" len="med"/>
+                      <a:tailEnd type="none" w="med" len="med"/>
+                    </a:lnR>
+                    <a:lnT w="12700" cap="flat" cmpd="sng" algn="ctr">
+                      <a:solidFill>
+                        <a:schemeClr val="tx1"/>
+                      </a:solidFill>
+                      <a:prstDash val="solid"/>
+                      <a:round/>
+                      <a:headEnd type="none" w="med" len="med"/>
+                      <a:tailEnd type="none" w="med" len="med"/>
+                    </a:lnT>
+                    <a:lnB w="12700" cap="flat" cmpd="sng" algn="ctr">
+                      <a:solidFill>
+                        <a:schemeClr val="tx1"/>
+                      </a:solidFill>
+                      <a:prstDash val="solid"/>
+                      <a:round/>
+                      <a:headEnd type="none" w="med" len="med"/>
+                      <a:tailEnd type="none" w="med" len="med"/>
+                    </a:lnB>
+                    <a:lnTlToBr w="12700" cmpd="sng">
+                      <a:noFill/>
+                      <a:prstDash val="solid"/>
+                    </a:lnTlToBr>
+                    <a:lnBlToTr w="12700" cmpd="sng">
+                      <a:noFill/>
+                      <a:prstDash val="solid"/>
+                    </a:lnBlToTr>
+                    <a:solidFill>
+                      <a:schemeClr val="tx1">
+                        <a:lumMod val="50000"/>
+                        <a:lumOff val="50000"/>
+                      </a:schemeClr>
+                    </a:solidFill>
+                  </a:tcPr>
+                </a:tc>
+                <a:extLst>
+                  <a:ext uri="{0D108BD9-81ED-4DB2-BD59-A6C34878D82A}">
+                    <a16:rowId xmlns:a16="http://schemas.microsoft.com/office/drawing/2014/main" val="4202594346"/>
+                  </a:ext>
+                </a:extLst>
+              </a:tr>
+              <a:tr h="756444">
+                <a:tc>
+                  <a:txBody>
+                    <a:bodyPr/>
+                    <a:lstStyle/>
+                    <a:p>
+                      <a:r>
+                        <a:rPr lang="en-GB" sz="1800" b="1" dirty="0">
+                          <a:latin typeface="Helvetica" pitchFamily="2" charset="0"/>
+                        </a:rPr>
+                        <a:t>Vendors</a:t>
+                      </a:r>
+                    </a:p>
+                  </a:txBody>
+                  <a:tcPr>
+                    <a:lnL w="12700" cap="flat" cmpd="sng" algn="ctr">
+                      <a:solidFill>
+                        <a:schemeClr val="tx1"/>
+                      </a:solidFill>
+                      <a:prstDash val="solid"/>
+                      <a:round/>
+                      <a:headEnd type="none" w="med" len="med"/>
+                      <a:tailEnd type="none" w="med" len="med"/>
+                    </a:lnL>
+                    <a:lnR w="12700" cap="flat" cmpd="sng" algn="ctr">
+                      <a:solidFill>
+                        <a:schemeClr val="tx1"/>
+                      </a:solidFill>
+                      <a:prstDash val="solid"/>
+                      <a:round/>
+                      <a:headEnd type="none" w="med" len="med"/>
+                      <a:tailEnd type="none" w="med" len="med"/>
+                    </a:lnR>
+                    <a:lnT w="12700" cap="flat" cmpd="sng" algn="ctr">
+                      <a:solidFill>
+                        <a:schemeClr val="tx1"/>
+                      </a:solidFill>
+                      <a:prstDash val="solid"/>
+                      <a:round/>
+                      <a:headEnd type="none" w="med" len="med"/>
+                      <a:tailEnd type="none" w="med" len="med"/>
+                    </a:lnT>
+                    <a:lnB w="12700" cap="flat" cmpd="sng" algn="ctr">
+                      <a:solidFill>
+                        <a:schemeClr val="tx1"/>
+                      </a:solidFill>
+                      <a:prstDash val="solid"/>
+                      <a:round/>
+                      <a:headEnd type="none" w="med" len="med"/>
+                      <a:tailEnd type="none" w="med" len="med"/>
+                    </a:lnB>
+                    <a:lnTlToBr w="12700" cmpd="sng">
+                      <a:noFill/>
+                      <a:prstDash val="solid"/>
+                    </a:lnTlToBr>
+                    <a:lnBlToTr w="12700" cmpd="sng">
+                      <a:noFill/>
+                      <a:prstDash val="solid"/>
+                    </a:lnBlToTr>
+                    <a:solidFill>
+                      <a:schemeClr val="accent2">
+                        <a:lumMod val="40000"/>
+                        <a:lumOff val="60000"/>
+                      </a:schemeClr>
+                    </a:solidFill>
+                  </a:tcPr>
+                </a:tc>
+                <a:tc gridSpan="2">
+                  <a:txBody>
+                    <a:bodyPr/>
+                    <a:lstStyle/>
+                    <a:p>
+                      <a:pPr marL="285750" marR="0" lvl="0" indent="-285750" algn="l" defTabSz="914400" rtl="0" eaLnBrk="1" fontAlgn="auto" latinLnBrk="0" hangingPunct="1">
+                        <a:lnSpc>
+                          <a:spcPct val="100000"/>
+                        </a:lnSpc>
+                        <a:spcBef>
+                          <a:spcPts val="0"/>
+                        </a:spcBef>
+                        <a:spcAft>
+                          <a:spcPts val="0"/>
+                        </a:spcAft>
+                        <a:buClrTx/>
+                        <a:buSzTx/>
+                        <a:buFont typeface="Arial" panose="020B0604020202020204" pitchFamily="34" charset="0"/>
+                        <a:buChar char="•"/>
+                        <a:tabLst/>
+                        <a:defRPr/>
+                      </a:pPr>
+                      <a:r>
+                        <a:rPr lang="en-GB" sz="1800" dirty="0">
+                          <a:latin typeface="Helvetica" pitchFamily="2" charset="0"/>
+                        </a:rPr>
+                        <a:t>Responsible marketing to encourage reduction of consumption</a:t>
+                      </a:r>
+                    </a:p>
+                    <a:p>
+                      <a:pPr marL="285750" indent="-285750">
+                        <a:buFont typeface="Arial" panose="020B0604020202020204" pitchFamily="34" charset="0"/>
+                        <a:buChar char="•"/>
+                      </a:pPr>
+                      <a:r>
+                        <a:rPr lang="en-GB" sz="1800" dirty="0">
+                          <a:latin typeface="Helvetica" pitchFamily="2" charset="0"/>
+                        </a:rPr>
+                        <a:t>Responsible manufacturing</a:t>
+                      </a:r>
+                    </a:p>
+                    <a:p>
+                      <a:pPr marL="285750" indent="-285750">
+                        <a:buFont typeface="Arial" panose="020B0604020202020204" pitchFamily="34" charset="0"/>
+                        <a:buChar char="•"/>
+                      </a:pPr>
+                      <a:r>
+                        <a:rPr lang="en-GB" sz="1800" dirty="0">
+                          <a:latin typeface="Helvetica" pitchFamily="2" charset="0"/>
+                        </a:rPr>
+                        <a:t>Provide affordable support for long service lifetimes</a:t>
+                      </a:r>
+                    </a:p>
+                  </a:txBody>
+                  <a:tcPr>
+                    <a:lnL w="12700" cap="flat" cmpd="sng" algn="ctr">
+                      <a:solidFill>
+                        <a:schemeClr val="tx1"/>
+                      </a:solidFill>
+                      <a:prstDash val="solid"/>
+                      <a:round/>
+                      <a:headEnd type="none" w="med" len="med"/>
+                      <a:tailEnd type="none" w="med" len="med"/>
+                    </a:lnL>
+                    <a:lnR w="12700" cap="flat" cmpd="sng" algn="ctr">
+                      <a:solidFill>
+                        <a:schemeClr val="tx1"/>
+                      </a:solidFill>
+                      <a:prstDash val="solid"/>
+                      <a:round/>
+                      <a:headEnd type="none" w="med" len="med"/>
+                      <a:tailEnd type="none" w="med" len="med"/>
+                    </a:lnR>
+                    <a:lnT w="12700" cap="flat" cmpd="sng" algn="ctr">
+                      <a:solidFill>
+                        <a:schemeClr val="tx1"/>
+                      </a:solidFill>
+                      <a:prstDash val="solid"/>
+                      <a:round/>
+                      <a:headEnd type="none" w="med" len="med"/>
+                      <a:tailEnd type="none" w="med" len="med"/>
+                    </a:lnT>
+                    <a:lnB w="12700" cap="flat" cmpd="sng" algn="ctr">
+                      <a:solidFill>
+                        <a:schemeClr val="tx1"/>
+                      </a:solidFill>
+                      <a:prstDash val="solid"/>
+                      <a:round/>
+                      <a:headEnd type="none" w="med" len="med"/>
+                      <a:tailEnd type="none" w="med" len="med"/>
+                    </a:lnB>
+                    <a:lnTlToBr w="12700" cmpd="sng">
+                      <a:noFill/>
+                      <a:prstDash val="solid"/>
+                    </a:lnTlToBr>
+                    <a:lnBlToTr w="12700" cmpd="sng">
+                      <a:noFill/>
+                      <a:prstDash val="solid"/>
+                    </a:lnBlToTr>
+                    <a:solidFill>
+                      <a:schemeClr val="accent2">
+                        <a:lumMod val="20000"/>
+                        <a:lumOff val="80000"/>
+                      </a:schemeClr>
+                    </a:solidFill>
+                  </a:tcPr>
+                </a:tc>
+                <a:tc hMerge="1">
+                  <a:txBody>
+                    <a:bodyPr/>
+                    <a:lstStyle/>
+                    <a:p>
+                      <a:endParaRPr lang="en-GB" sz="1400" dirty="0"/>
+                    </a:p>
+                  </a:txBody>
+                  <a:tcPr/>
+                </a:tc>
+                <a:extLst>
+                  <a:ext uri="{0D108BD9-81ED-4DB2-BD59-A6C34878D82A}">
+                    <a16:rowId xmlns:a16="http://schemas.microsoft.com/office/drawing/2014/main" val="3900308958"/>
+                  </a:ext>
+                </a:extLst>
+              </a:tr>
+              <a:tr h="588819">
+                <a:tc rowSpan="2">
+                  <a:txBody>
+                    <a:bodyPr/>
+                    <a:lstStyle/>
+                    <a:p>
+                      <a:r>
+                        <a:rPr lang="en-GB" sz="1800" b="1" dirty="0">
+                          <a:latin typeface="Helvetica" pitchFamily="2" charset="0"/>
+                        </a:rPr>
+                        <a:t>Service Operators</a:t>
+                      </a:r>
+                    </a:p>
+                  </a:txBody>
+                  <a:tcPr>
+                    <a:lnL w="12700" cap="flat" cmpd="sng" algn="ctr">
+                      <a:solidFill>
+                        <a:schemeClr val="tx1"/>
+                      </a:solidFill>
+                      <a:prstDash val="solid"/>
+                      <a:round/>
+                      <a:headEnd type="none" w="med" len="med"/>
+                      <a:tailEnd type="none" w="med" len="med"/>
+                    </a:lnL>
+                    <a:lnR w="12700" cap="flat" cmpd="sng" algn="ctr">
+                      <a:solidFill>
+                        <a:schemeClr val="tx1"/>
+                      </a:solidFill>
+                      <a:prstDash val="solid"/>
+                      <a:round/>
+                      <a:headEnd type="none" w="med" len="med"/>
+                      <a:tailEnd type="none" w="med" len="med"/>
+                    </a:lnR>
+                    <a:lnT w="12700" cap="flat" cmpd="sng" algn="ctr">
+                      <a:solidFill>
+                        <a:schemeClr val="tx1"/>
+                      </a:solidFill>
+                      <a:prstDash val="solid"/>
+                      <a:round/>
+                      <a:headEnd type="none" w="med" len="med"/>
+                      <a:tailEnd type="none" w="med" len="med"/>
+                    </a:lnT>
+                    <a:lnB w="12700" cap="flat" cmpd="sng" algn="ctr">
+                      <a:solidFill>
+                        <a:schemeClr val="tx1"/>
+                      </a:solidFill>
+                      <a:prstDash val="solid"/>
+                      <a:round/>
+                      <a:headEnd type="none" w="med" len="med"/>
+                      <a:tailEnd type="none" w="med" len="med"/>
+                    </a:lnB>
+                    <a:lnTlToBr w="12700" cmpd="sng">
+                      <a:noFill/>
+                      <a:prstDash val="solid"/>
+                    </a:lnTlToBr>
+                    <a:lnBlToTr w="12700" cmpd="sng">
+                      <a:noFill/>
+                      <a:prstDash val="solid"/>
+                    </a:lnBlToTr>
+                    <a:solidFill>
+                      <a:schemeClr val="accent6">
+                        <a:lumMod val="40000"/>
+                        <a:lumOff val="60000"/>
+                      </a:schemeClr>
+                    </a:solidFill>
+                  </a:tcPr>
+                </a:tc>
+                <a:tc>
+                  <a:txBody>
+                    <a:bodyPr/>
+                    <a:lstStyle/>
+                    <a:p>
+                      <a:pPr marL="285750" indent="-285750">
+                        <a:buFont typeface="Arial" panose="020B0604020202020204" pitchFamily="34" charset="0"/>
+                        <a:buChar char="•"/>
+                      </a:pPr>
+                      <a:r>
+                        <a:rPr lang="en-GB" sz="1800" dirty="0">
+                          <a:latin typeface="Helvetica" pitchFamily="2" charset="0"/>
+                        </a:rPr>
+                        <a:t>Run services for as long as possible</a:t>
+                      </a:r>
+                    </a:p>
+                    <a:p>
+                      <a:pPr marL="285750" indent="-285750">
+                        <a:buFont typeface="Arial" panose="020B0604020202020204" pitchFamily="34" charset="0"/>
+                        <a:buChar char="•"/>
+                      </a:pPr>
+                      <a:r>
+                        <a:rPr lang="en-GB" sz="1800" dirty="0">
+                          <a:latin typeface="Helvetica" pitchFamily="2" charset="0"/>
+                        </a:rPr>
+                        <a:t>Optimise service for performance</a:t>
+                      </a:r>
+                    </a:p>
+                  </a:txBody>
+                  <a:tcPr>
+                    <a:lnL w="12700" cap="flat" cmpd="sng" algn="ctr">
+                      <a:solidFill>
+                        <a:schemeClr val="tx1"/>
+                      </a:solidFill>
+                      <a:prstDash val="solid"/>
+                      <a:round/>
+                      <a:headEnd type="none" w="med" len="med"/>
+                      <a:tailEnd type="none" w="med" len="med"/>
+                    </a:lnL>
+                    <a:lnR w="12700" cap="flat" cmpd="sng" algn="ctr">
+                      <a:solidFill>
+                        <a:schemeClr val="tx1"/>
+                      </a:solidFill>
+                      <a:prstDash val="solid"/>
+                      <a:round/>
+                      <a:headEnd type="none" w="med" len="med"/>
+                      <a:tailEnd type="none" w="med" len="med"/>
+                    </a:lnR>
+                    <a:lnT w="12700" cap="flat" cmpd="sng" algn="ctr">
+                      <a:solidFill>
+                        <a:schemeClr val="tx1"/>
+                      </a:solidFill>
+                      <a:prstDash val="solid"/>
+                      <a:round/>
+                      <a:headEnd type="none" w="med" len="med"/>
+                      <a:tailEnd type="none" w="med" len="med"/>
+                    </a:lnT>
+                    <a:lnB w="12700" cap="flat" cmpd="sng" algn="ctr">
+                      <a:solidFill>
+                        <a:schemeClr val="tx1"/>
+                      </a:solidFill>
+                      <a:prstDash val="solid"/>
+                      <a:round/>
+                      <a:headEnd type="none" w="med" len="med"/>
+                      <a:tailEnd type="none" w="med" len="med"/>
+                    </a:lnB>
+                    <a:lnTlToBr w="12700" cmpd="sng">
+                      <a:noFill/>
+                      <a:prstDash val="solid"/>
+                    </a:lnTlToBr>
+                    <a:lnBlToTr w="12700" cmpd="sng">
+                      <a:noFill/>
+                      <a:prstDash val="solid"/>
+                    </a:lnBlToTr>
+                    <a:solidFill>
+                      <a:schemeClr val="accent6">
+                        <a:lumMod val="20000"/>
+                        <a:lumOff val="80000"/>
+                      </a:schemeClr>
+                    </a:solidFill>
+                  </a:tcPr>
+                </a:tc>
+                <a:tc>
+                  <a:txBody>
+                    <a:bodyPr/>
+                    <a:lstStyle/>
+                    <a:p>
+                      <a:pPr marL="285750" indent="-285750">
+                        <a:buFont typeface="Arial" panose="020B0604020202020204" pitchFamily="34" charset="0"/>
+                        <a:buChar char="•"/>
+                      </a:pPr>
+                      <a:r>
+                        <a:rPr lang="en-GB" sz="1800" dirty="0">
+                          <a:latin typeface="Helvetica" pitchFamily="2" charset="0"/>
+                        </a:rPr>
+                        <a:t>Optimise system for energy efficiency</a:t>
+                      </a:r>
+                    </a:p>
+                    <a:p>
+                      <a:pPr marL="285750" indent="-285750">
+                        <a:buFont typeface="Arial" panose="020B0604020202020204" pitchFamily="34" charset="0"/>
+                        <a:buChar char="•"/>
+                      </a:pPr>
+                      <a:r>
+                        <a:rPr lang="en-GB" sz="1800" dirty="0">
+                          <a:latin typeface="Helvetica" pitchFamily="2" charset="0"/>
+                        </a:rPr>
+                        <a:t>Enable carbon aware scheduling on services</a:t>
+                      </a:r>
+                    </a:p>
+                  </a:txBody>
+                  <a:tcPr>
+                    <a:lnL w="12700" cap="flat" cmpd="sng" algn="ctr">
+                      <a:solidFill>
+                        <a:schemeClr val="tx1"/>
+                      </a:solidFill>
+                      <a:prstDash val="solid"/>
+                      <a:round/>
+                      <a:headEnd type="none" w="med" len="med"/>
+                      <a:tailEnd type="none" w="med" len="med"/>
+                    </a:lnL>
+                    <a:lnR w="12700" cap="flat" cmpd="sng" algn="ctr">
+                      <a:solidFill>
+                        <a:schemeClr val="tx1"/>
+                      </a:solidFill>
+                      <a:prstDash val="solid"/>
+                      <a:round/>
+                      <a:headEnd type="none" w="med" len="med"/>
+                      <a:tailEnd type="none" w="med" len="med"/>
+                    </a:lnR>
+                    <a:lnT w="12700" cap="flat" cmpd="sng" algn="ctr">
+                      <a:solidFill>
+                        <a:schemeClr val="tx1"/>
+                      </a:solidFill>
+                      <a:prstDash val="solid"/>
+                      <a:round/>
+                      <a:headEnd type="none" w="med" len="med"/>
+                      <a:tailEnd type="none" w="med" len="med"/>
+                    </a:lnT>
+                    <a:lnB w="12700" cap="flat" cmpd="sng" algn="ctr">
+                      <a:solidFill>
+                        <a:schemeClr val="tx1"/>
+                      </a:solidFill>
+                      <a:prstDash val="solid"/>
+                      <a:round/>
+                      <a:headEnd type="none" w="med" len="med"/>
+                      <a:tailEnd type="none" w="med" len="med"/>
+                    </a:lnB>
+                    <a:lnTlToBr w="12700" cmpd="sng">
+                      <a:noFill/>
+                      <a:prstDash val="solid"/>
+                    </a:lnTlToBr>
+                    <a:lnBlToTr w="12700" cmpd="sng">
+                      <a:noFill/>
+                      <a:prstDash val="solid"/>
+                    </a:lnBlToTr>
+                    <a:solidFill>
+                      <a:schemeClr val="accent6">
+                        <a:lumMod val="20000"/>
+                        <a:lumOff val="80000"/>
+                      </a:schemeClr>
+                    </a:solidFill>
+                  </a:tcPr>
+                </a:tc>
+                <a:extLst>
+                  <a:ext uri="{0D108BD9-81ED-4DB2-BD59-A6C34878D82A}">
+                    <a16:rowId xmlns:a16="http://schemas.microsoft.com/office/drawing/2014/main" val="230011588"/>
+                  </a:ext>
+                </a:extLst>
+              </a:tr>
+              <a:tr h="373108">
+                <a:tc vMerge="1">
+                  <a:txBody>
+                    <a:bodyPr/>
+                    <a:lstStyle/>
+                    <a:p>
+                      <a:endParaRPr lang="en-GB" sz="1800" b="1" dirty="0"/>
+                    </a:p>
+                  </a:txBody>
+                  <a:tcPr>
+                    <a:lnL w="12700" cap="flat" cmpd="sng" algn="ctr">
+                      <a:solidFill>
+                        <a:schemeClr val="tx1"/>
+                      </a:solidFill>
+                      <a:prstDash val="solid"/>
+                      <a:round/>
+                      <a:headEnd type="none" w="med" len="med"/>
+                      <a:tailEnd type="none" w="med" len="med"/>
+                    </a:lnL>
+                    <a:lnR w="12700" cap="flat" cmpd="sng" algn="ctr">
+                      <a:solidFill>
+                        <a:schemeClr val="tx1"/>
+                      </a:solidFill>
+                      <a:prstDash val="solid"/>
+                      <a:round/>
+                      <a:headEnd type="none" w="med" len="med"/>
+                      <a:tailEnd type="none" w="med" len="med"/>
+                    </a:lnR>
+                    <a:lnT w="12700" cap="flat" cmpd="sng" algn="ctr">
+                      <a:solidFill>
+                        <a:schemeClr val="tx1"/>
+                      </a:solidFill>
+                      <a:prstDash val="solid"/>
+                      <a:round/>
+                      <a:headEnd type="none" w="med" len="med"/>
+                      <a:tailEnd type="none" w="med" len="med"/>
+                    </a:lnT>
+                    <a:lnB w="12700" cap="flat" cmpd="sng" algn="ctr">
+                      <a:solidFill>
+                        <a:schemeClr val="tx1"/>
+                      </a:solidFill>
+                      <a:prstDash val="solid"/>
+                      <a:round/>
+                      <a:headEnd type="none" w="med" len="med"/>
+                      <a:tailEnd type="none" w="med" len="med"/>
+                    </a:lnB>
+                    <a:lnTlToBr w="12700" cmpd="sng">
+                      <a:noFill/>
+                      <a:prstDash val="solid"/>
+                    </a:lnTlToBr>
+                    <a:lnBlToTr w="12700" cmpd="sng">
+                      <a:noFill/>
+                      <a:prstDash val="solid"/>
+                    </a:lnBlToTr>
+                    <a:solidFill>
+                      <a:schemeClr val="accent6">
+                        <a:lumMod val="40000"/>
+                        <a:lumOff val="60000"/>
+                      </a:schemeClr>
+                    </a:solidFill>
+                  </a:tcPr>
+                </a:tc>
+                <a:tc gridSpan="2">
+                  <a:txBody>
+                    <a:bodyPr/>
+                    <a:lstStyle/>
+                    <a:p>
+                      <a:pPr marL="285750" indent="-285750">
+                        <a:buFont typeface="Arial" panose="020B0604020202020204" pitchFamily="34" charset="0"/>
+                        <a:buChar char="•"/>
+                      </a:pPr>
+                      <a:r>
+                        <a:rPr lang="en-GB" sz="1800" dirty="0">
+                          <a:latin typeface="Helvetica" pitchFamily="2" charset="0"/>
+                        </a:rPr>
+                        <a:t>Purchase minimum possible amount of hardware</a:t>
+                      </a:r>
+                    </a:p>
+                    <a:p>
+                      <a:pPr marL="285750" indent="-285750">
+                        <a:buFont typeface="Arial" panose="020B0604020202020204" pitchFamily="34" charset="0"/>
+                        <a:buChar char="•"/>
+                      </a:pPr>
+                      <a:r>
+                        <a:rPr lang="en-GB" sz="1800" dirty="0">
+                          <a:latin typeface="Helvetica" pitchFamily="2" charset="0"/>
+                        </a:rPr>
+                        <a:t>Make emissions assessment a key part of system procurement</a:t>
+                      </a:r>
+                    </a:p>
+                    <a:p>
+                      <a:pPr marL="285750" indent="-285750">
+                        <a:buFont typeface="Arial" panose="020B0604020202020204" pitchFamily="34" charset="0"/>
+                        <a:buChar char="•"/>
+                      </a:pPr>
+                      <a:r>
+                        <a:rPr lang="en-GB" sz="1800" dirty="0">
+                          <a:latin typeface="Helvetica" pitchFamily="2" charset="0"/>
+                        </a:rPr>
+                        <a:t>Site HPC systems in locations with low carbon intensity</a:t>
+                      </a:r>
+                    </a:p>
+                    <a:p>
+                      <a:pPr marL="285750" marR="0" lvl="0" indent="-285750" algn="l" defTabSz="914400" rtl="0" eaLnBrk="1" fontAlgn="auto" latinLnBrk="0" hangingPunct="1">
+                        <a:lnSpc>
+                          <a:spcPct val="100000"/>
+                        </a:lnSpc>
+                        <a:spcBef>
+                          <a:spcPts val="0"/>
+                        </a:spcBef>
+                        <a:spcAft>
+                          <a:spcPts val="0"/>
+                        </a:spcAft>
+                        <a:buClrTx/>
+                        <a:buSzTx/>
+                        <a:buFont typeface="Arial" panose="020B0604020202020204" pitchFamily="34" charset="0"/>
+                        <a:buChar char="•"/>
+                        <a:tabLst/>
+                        <a:defRPr/>
+                      </a:pPr>
+                      <a:r>
+                        <a:rPr lang="en-GB" sz="1800" dirty="0">
+                          <a:latin typeface="Helvetica" pitchFamily="2" charset="0"/>
+                        </a:rPr>
+                        <a:t>Policies and application processes to support/encourage emissions-efficiency</a:t>
+                      </a:r>
+                    </a:p>
+                  </a:txBody>
+                  <a:tcPr>
+                    <a:lnL w="12700" cap="flat" cmpd="sng" algn="ctr">
+                      <a:solidFill>
+                        <a:schemeClr val="tx1"/>
+                      </a:solidFill>
+                      <a:prstDash val="solid"/>
+                      <a:round/>
+                      <a:headEnd type="none" w="med" len="med"/>
+                      <a:tailEnd type="none" w="med" len="med"/>
+                    </a:lnL>
+                    <a:lnR w="12700" cap="flat" cmpd="sng" algn="ctr">
+                      <a:solidFill>
+                        <a:schemeClr val="tx1"/>
+                      </a:solidFill>
+                      <a:prstDash val="solid"/>
+                      <a:round/>
+                      <a:headEnd type="none" w="med" len="med"/>
+                      <a:tailEnd type="none" w="med" len="med"/>
+                    </a:lnR>
+                    <a:lnT w="12700" cap="flat" cmpd="sng" algn="ctr">
+                      <a:solidFill>
+                        <a:schemeClr val="tx1"/>
+                      </a:solidFill>
+                      <a:prstDash val="solid"/>
+                      <a:round/>
+                      <a:headEnd type="none" w="med" len="med"/>
+                      <a:tailEnd type="none" w="med" len="med"/>
+                    </a:lnT>
+                    <a:lnB w="12700" cap="flat" cmpd="sng" algn="ctr">
+                      <a:solidFill>
+                        <a:schemeClr val="tx1"/>
+                      </a:solidFill>
+                      <a:prstDash val="solid"/>
+                      <a:round/>
+                      <a:headEnd type="none" w="med" len="med"/>
+                      <a:tailEnd type="none" w="med" len="med"/>
+                    </a:lnB>
+                    <a:lnTlToBr w="12700" cmpd="sng">
+                      <a:noFill/>
+                      <a:prstDash val="solid"/>
+                    </a:lnTlToBr>
+                    <a:lnBlToTr w="12700" cmpd="sng">
+                      <a:noFill/>
+                      <a:prstDash val="solid"/>
+                    </a:lnBlToTr>
+                    <a:solidFill>
+                      <a:schemeClr val="accent6">
+                        <a:lumMod val="20000"/>
+                        <a:lumOff val="80000"/>
+                      </a:schemeClr>
+                    </a:solidFill>
+                  </a:tcPr>
+                </a:tc>
+                <a:tc hMerge="1">
+                  <a:txBody>
+                    <a:bodyPr/>
+                    <a:lstStyle/>
+                    <a:p>
+                      <a:pPr marL="285750" indent="-285750">
+                        <a:buFont typeface="Arial" panose="020B0604020202020204" pitchFamily="34" charset="0"/>
+                        <a:buChar char="•"/>
+                      </a:pPr>
+                      <a:endParaRPr lang="en-GB" sz="1400" dirty="0"/>
+                    </a:p>
+                  </a:txBody>
+                  <a:tcPr/>
+                </a:tc>
+                <a:extLst>
+                  <a:ext uri="{0D108BD9-81ED-4DB2-BD59-A6C34878D82A}">
+                    <a16:rowId xmlns:a16="http://schemas.microsoft.com/office/drawing/2014/main" val="3710797445"/>
+                  </a:ext>
+                </a:extLst>
+              </a:tr>
+              <a:tr h="644724">
+                <a:tc rowSpan="2">
+                  <a:txBody>
+                    <a:bodyPr/>
+                    <a:lstStyle/>
+                    <a:p>
+                      <a:r>
+                        <a:rPr lang="en-GB" sz="1800" b="1" dirty="0">
+                          <a:latin typeface="Helvetica" pitchFamily="2" charset="0"/>
+                        </a:rPr>
+                        <a:t>RSEs</a:t>
+                      </a:r>
+                    </a:p>
+                  </a:txBody>
+                  <a:tcPr>
+                    <a:lnL w="12700" cap="flat" cmpd="sng" algn="ctr">
+                      <a:solidFill>
+                        <a:schemeClr val="tx1"/>
+                      </a:solidFill>
+                      <a:prstDash val="solid"/>
+                      <a:round/>
+                      <a:headEnd type="none" w="med" len="med"/>
+                      <a:tailEnd type="none" w="med" len="med"/>
+                    </a:lnL>
+                    <a:lnR w="12700" cap="flat" cmpd="sng" algn="ctr">
+                      <a:solidFill>
+                        <a:schemeClr val="tx1"/>
+                      </a:solidFill>
+                      <a:prstDash val="solid"/>
+                      <a:round/>
+                      <a:headEnd type="none" w="med" len="med"/>
+                      <a:tailEnd type="none" w="med" len="med"/>
+                    </a:lnR>
+                    <a:lnT w="12700" cap="flat" cmpd="sng" algn="ctr">
+                      <a:solidFill>
+                        <a:schemeClr val="tx1"/>
+                      </a:solidFill>
+                      <a:prstDash val="solid"/>
+                      <a:round/>
+                      <a:headEnd type="none" w="med" len="med"/>
+                      <a:tailEnd type="none" w="med" len="med"/>
+                    </a:lnT>
+                    <a:lnB w="12700" cap="flat" cmpd="sng" algn="ctr">
+                      <a:solidFill>
+                        <a:schemeClr val="tx1"/>
+                      </a:solidFill>
+                      <a:prstDash val="solid"/>
+                      <a:round/>
+                      <a:headEnd type="none" w="med" len="med"/>
+                      <a:tailEnd type="none" w="med" len="med"/>
+                    </a:lnB>
+                    <a:lnTlToBr w="12700" cmpd="sng">
+                      <a:noFill/>
+                      <a:prstDash val="solid"/>
+                    </a:lnTlToBr>
+                    <a:lnBlToTr w="12700" cmpd="sng">
+                      <a:noFill/>
+                      <a:prstDash val="solid"/>
+                    </a:lnBlToTr>
+                    <a:solidFill>
+                      <a:schemeClr val="accent1">
+                        <a:lumMod val="40000"/>
+                        <a:lumOff val="60000"/>
+                      </a:schemeClr>
+                    </a:solidFill>
+                  </a:tcPr>
+                </a:tc>
+                <a:tc>
+                  <a:txBody>
+                    <a:bodyPr/>
+                    <a:lstStyle/>
+                    <a:p>
+                      <a:pPr marL="285750" indent="-285750">
+                        <a:buFont typeface="Arial" panose="020B0604020202020204" pitchFamily="34" charset="0"/>
+                        <a:buChar char="•"/>
+                      </a:pPr>
+                      <a:r>
+                        <a:rPr lang="en-GB" sz="1800" dirty="0">
+                          <a:latin typeface="Helvetica" pitchFamily="2" charset="0"/>
+                        </a:rPr>
+                        <a:t>Optimise software for maximum performance</a:t>
+                      </a:r>
+                    </a:p>
+                    <a:p>
+                      <a:pPr marL="285750" indent="-285750">
+                        <a:buFont typeface="Arial" panose="020B0604020202020204" pitchFamily="34" charset="0"/>
+                        <a:buChar char="•"/>
+                      </a:pPr>
+                      <a:r>
+                        <a:rPr lang="en-GB" sz="1800" dirty="0">
+                          <a:latin typeface="Helvetica" pitchFamily="2" charset="0"/>
+                        </a:rPr>
+                        <a:t>Algorithms to exploit new hardware innovations</a:t>
+                      </a:r>
+                    </a:p>
+                  </a:txBody>
+                  <a:tcPr>
+                    <a:lnL w="12700" cap="flat" cmpd="sng" algn="ctr">
+                      <a:solidFill>
+                        <a:schemeClr val="tx1"/>
+                      </a:solidFill>
+                      <a:prstDash val="solid"/>
+                      <a:round/>
+                      <a:headEnd type="none" w="med" len="med"/>
+                      <a:tailEnd type="none" w="med" len="med"/>
+                    </a:lnL>
+                    <a:lnR w="12700" cap="flat" cmpd="sng" algn="ctr">
+                      <a:solidFill>
+                        <a:schemeClr val="tx1"/>
+                      </a:solidFill>
+                      <a:prstDash val="solid"/>
+                      <a:round/>
+                      <a:headEnd type="none" w="med" len="med"/>
+                      <a:tailEnd type="none" w="med" len="med"/>
+                    </a:lnR>
+                    <a:lnT w="12700" cap="flat" cmpd="sng" algn="ctr">
+                      <a:solidFill>
+                        <a:schemeClr val="tx1"/>
+                      </a:solidFill>
+                      <a:prstDash val="solid"/>
+                      <a:round/>
+                      <a:headEnd type="none" w="med" len="med"/>
+                      <a:tailEnd type="none" w="med" len="med"/>
+                    </a:lnT>
+                    <a:lnB w="12700" cap="flat" cmpd="sng" algn="ctr">
+                      <a:solidFill>
+                        <a:schemeClr val="tx1"/>
+                      </a:solidFill>
+                      <a:prstDash val="solid"/>
+                      <a:round/>
+                      <a:headEnd type="none" w="med" len="med"/>
+                      <a:tailEnd type="none" w="med" len="med"/>
+                    </a:lnB>
+                    <a:lnTlToBr w="12700" cmpd="sng">
+                      <a:noFill/>
+                      <a:prstDash val="solid"/>
+                    </a:lnTlToBr>
+                    <a:lnBlToTr w="12700" cmpd="sng">
+                      <a:noFill/>
+                      <a:prstDash val="solid"/>
+                    </a:lnBlToTr>
+                    <a:solidFill>
+                      <a:schemeClr val="accent5">
+                        <a:lumMod val="20000"/>
+                        <a:lumOff val="80000"/>
+                      </a:schemeClr>
+                    </a:solidFill>
+                  </a:tcPr>
+                </a:tc>
+                <a:tc>
+                  <a:txBody>
+                    <a:bodyPr/>
+                    <a:lstStyle/>
+                    <a:p>
+                      <a:pPr marL="285750" indent="-285750">
+                        <a:buFont typeface="Arial" panose="020B0604020202020204" pitchFamily="34" charset="0"/>
+                        <a:buChar char="•"/>
+                      </a:pPr>
+                      <a:r>
+                        <a:rPr lang="en-GB" sz="1800" dirty="0">
+                          <a:latin typeface="Helvetica" pitchFamily="2" charset="0"/>
+                        </a:rPr>
+                        <a:t>Optimise software for energy efficiency</a:t>
+                      </a:r>
+                    </a:p>
+                  </a:txBody>
+                  <a:tcPr>
+                    <a:lnL w="12700" cap="flat" cmpd="sng" algn="ctr">
+                      <a:solidFill>
+                        <a:schemeClr val="tx1"/>
+                      </a:solidFill>
+                      <a:prstDash val="solid"/>
+                      <a:round/>
+                      <a:headEnd type="none" w="med" len="med"/>
+                      <a:tailEnd type="none" w="med" len="med"/>
+                    </a:lnL>
+                    <a:lnR w="12700" cap="flat" cmpd="sng" algn="ctr">
+                      <a:solidFill>
+                        <a:schemeClr val="tx1"/>
+                      </a:solidFill>
+                      <a:prstDash val="solid"/>
+                      <a:round/>
+                      <a:headEnd type="none" w="med" len="med"/>
+                      <a:tailEnd type="none" w="med" len="med"/>
+                    </a:lnR>
+                    <a:lnT w="12700" cap="flat" cmpd="sng" algn="ctr">
+                      <a:solidFill>
+                        <a:schemeClr val="tx1"/>
+                      </a:solidFill>
+                      <a:prstDash val="solid"/>
+                      <a:round/>
+                      <a:headEnd type="none" w="med" len="med"/>
+                      <a:tailEnd type="none" w="med" len="med"/>
+                    </a:lnT>
+                    <a:lnB w="12700" cap="flat" cmpd="sng" algn="ctr">
+                      <a:solidFill>
+                        <a:schemeClr val="tx1"/>
+                      </a:solidFill>
+                      <a:prstDash val="solid"/>
+                      <a:round/>
+                      <a:headEnd type="none" w="med" len="med"/>
+                      <a:tailEnd type="none" w="med" len="med"/>
+                    </a:lnB>
+                    <a:lnTlToBr w="12700" cmpd="sng">
+                      <a:noFill/>
+                      <a:prstDash val="solid"/>
+                    </a:lnTlToBr>
+                    <a:lnBlToTr w="12700" cmpd="sng">
+                      <a:noFill/>
+                      <a:prstDash val="solid"/>
+                    </a:lnBlToTr>
+                    <a:solidFill>
+                      <a:schemeClr val="accent5">
+                        <a:lumMod val="20000"/>
+                        <a:lumOff val="80000"/>
+                      </a:schemeClr>
+                    </a:solidFill>
+                  </a:tcPr>
+                </a:tc>
+                <a:extLst>
+                  <a:ext uri="{0D108BD9-81ED-4DB2-BD59-A6C34878D82A}">
+                    <a16:rowId xmlns:a16="http://schemas.microsoft.com/office/drawing/2014/main" val="1620555252"/>
+                  </a:ext>
+                </a:extLst>
+              </a:tr>
+              <a:tr h="373108">
+                <a:tc vMerge="1">
+                  <a:txBody>
+                    <a:bodyPr/>
+                    <a:lstStyle/>
+                    <a:p>
+                      <a:endParaRPr lang="en-GB" sz="1800" b="1" dirty="0"/>
+                    </a:p>
+                  </a:txBody>
+                  <a:tcPr>
+                    <a:lnL w="12700" cap="flat" cmpd="sng" algn="ctr">
+                      <a:solidFill>
+                        <a:schemeClr val="tx1"/>
+                      </a:solidFill>
+                      <a:prstDash val="solid"/>
+                      <a:round/>
+                      <a:headEnd type="none" w="med" len="med"/>
+                      <a:tailEnd type="none" w="med" len="med"/>
+                    </a:lnL>
+                    <a:lnR w="12700" cap="flat" cmpd="sng" algn="ctr">
+                      <a:solidFill>
+                        <a:schemeClr val="tx1"/>
+                      </a:solidFill>
+                      <a:prstDash val="solid"/>
+                      <a:round/>
+                      <a:headEnd type="none" w="med" len="med"/>
+                      <a:tailEnd type="none" w="med" len="med"/>
+                    </a:lnR>
+                    <a:lnT w="12700" cap="flat" cmpd="sng" algn="ctr">
+                      <a:solidFill>
+                        <a:schemeClr val="tx1"/>
+                      </a:solidFill>
+                      <a:prstDash val="solid"/>
+                      <a:round/>
+                      <a:headEnd type="none" w="med" len="med"/>
+                      <a:tailEnd type="none" w="med" len="med"/>
+                    </a:lnT>
+                    <a:lnB w="12700" cap="flat" cmpd="sng" algn="ctr">
+                      <a:solidFill>
+                        <a:schemeClr val="tx1"/>
+                      </a:solidFill>
+                      <a:prstDash val="solid"/>
+                      <a:round/>
+                      <a:headEnd type="none" w="med" len="med"/>
+                      <a:tailEnd type="none" w="med" len="med"/>
+                    </a:lnB>
+                    <a:lnTlToBr w="12700" cmpd="sng">
+                      <a:noFill/>
+                      <a:prstDash val="solid"/>
+                    </a:lnTlToBr>
+                    <a:lnBlToTr w="12700" cmpd="sng">
+                      <a:noFill/>
+                      <a:prstDash val="solid"/>
+                    </a:lnBlToTr>
+                    <a:solidFill>
+                      <a:schemeClr val="accent1">
+                        <a:lumMod val="40000"/>
+                        <a:lumOff val="60000"/>
+                      </a:schemeClr>
+                    </a:solidFill>
+                  </a:tcPr>
+                </a:tc>
+                <a:tc gridSpan="2">
+                  <a:txBody>
+                    <a:bodyPr/>
+                    <a:lstStyle/>
+                    <a:p>
+                      <a:pPr marL="285750" marR="0" lvl="0" indent="-285750" algn="l" defTabSz="914400" rtl="0" eaLnBrk="1" fontAlgn="auto" latinLnBrk="0" hangingPunct="1">
+                        <a:lnSpc>
+                          <a:spcPct val="100000"/>
+                        </a:lnSpc>
+                        <a:spcBef>
+                          <a:spcPts val="0"/>
+                        </a:spcBef>
+                        <a:spcAft>
+                          <a:spcPts val="0"/>
+                        </a:spcAft>
+                        <a:buClrTx/>
+                        <a:buSzTx/>
+                        <a:buFont typeface="Arial" panose="020B0604020202020204" pitchFamily="34" charset="0"/>
+                        <a:buChar char="•"/>
+                        <a:tabLst/>
+                        <a:defRPr/>
+                      </a:pPr>
+                      <a:r>
+                        <a:rPr lang="en-GB" sz="1800" dirty="0">
+                          <a:latin typeface="Helvetica" pitchFamily="2" charset="0"/>
+                        </a:rPr>
+                        <a:t>Training for users on how to maximise emissions efficiency</a:t>
+                      </a:r>
+                    </a:p>
+                    <a:p>
+                      <a:pPr marL="285750" marR="0" lvl="0" indent="-285750" algn="l" defTabSz="914400" rtl="0" eaLnBrk="1" fontAlgn="auto" latinLnBrk="0" hangingPunct="1">
+                        <a:lnSpc>
+                          <a:spcPct val="100000"/>
+                        </a:lnSpc>
+                        <a:spcBef>
+                          <a:spcPts val="0"/>
+                        </a:spcBef>
+                        <a:spcAft>
+                          <a:spcPts val="0"/>
+                        </a:spcAft>
+                        <a:buClrTx/>
+                        <a:buSzTx/>
+                        <a:buFont typeface="Arial" panose="020B0604020202020204" pitchFamily="34" charset="0"/>
+                        <a:buChar char="•"/>
+                        <a:tabLst/>
+                        <a:defRPr/>
+                      </a:pPr>
+                      <a:r>
+                        <a:rPr lang="en-GB" sz="1800" dirty="0">
+                          <a:latin typeface="Helvetica" pitchFamily="2" charset="0"/>
+                        </a:rPr>
+                        <a:t>Embed emissions assessment into benchmarking and performance analysis</a:t>
+                      </a:r>
+                    </a:p>
+                  </a:txBody>
+                  <a:tcPr>
+                    <a:lnL w="12700" cap="flat" cmpd="sng" algn="ctr">
+                      <a:solidFill>
+                        <a:schemeClr val="tx1"/>
+                      </a:solidFill>
+                      <a:prstDash val="solid"/>
+                      <a:round/>
+                      <a:headEnd type="none" w="med" len="med"/>
+                      <a:tailEnd type="none" w="med" len="med"/>
+                    </a:lnL>
+                    <a:lnR w="12700" cap="flat" cmpd="sng" algn="ctr">
+                      <a:solidFill>
+                        <a:schemeClr val="tx1"/>
+                      </a:solidFill>
+                      <a:prstDash val="solid"/>
+                      <a:round/>
+                      <a:headEnd type="none" w="med" len="med"/>
+                      <a:tailEnd type="none" w="med" len="med"/>
+                    </a:lnR>
+                    <a:lnT w="12700" cap="flat" cmpd="sng" algn="ctr">
+                      <a:solidFill>
+                        <a:schemeClr val="tx1"/>
+                      </a:solidFill>
+                      <a:prstDash val="solid"/>
+                      <a:round/>
+                      <a:headEnd type="none" w="med" len="med"/>
+                      <a:tailEnd type="none" w="med" len="med"/>
+                    </a:lnT>
+                    <a:lnB w="12700" cap="flat" cmpd="sng" algn="ctr">
+                      <a:solidFill>
+                        <a:schemeClr val="tx1"/>
+                      </a:solidFill>
+                      <a:prstDash val="solid"/>
+                      <a:round/>
+                      <a:headEnd type="none" w="med" len="med"/>
+                      <a:tailEnd type="none" w="med" len="med"/>
+                    </a:lnB>
+                    <a:lnTlToBr w="12700" cmpd="sng">
+                      <a:noFill/>
+                      <a:prstDash val="solid"/>
+                    </a:lnTlToBr>
+                    <a:lnBlToTr w="12700" cmpd="sng">
+                      <a:noFill/>
+                      <a:prstDash val="solid"/>
+                    </a:lnBlToTr>
+                    <a:solidFill>
+                      <a:schemeClr val="accent5">
+                        <a:lumMod val="20000"/>
+                        <a:lumOff val="80000"/>
+                      </a:schemeClr>
+                    </a:solidFill>
+                  </a:tcPr>
+                </a:tc>
+                <a:tc hMerge="1">
+                  <a:txBody>
+                    <a:bodyPr/>
+                    <a:lstStyle/>
+                    <a:p>
+                      <a:pPr marL="285750" indent="-285750">
+                        <a:buFont typeface="Arial" panose="020B0604020202020204" pitchFamily="34" charset="0"/>
+                        <a:buChar char="•"/>
+                      </a:pPr>
+                      <a:endParaRPr lang="en-GB" sz="1400" dirty="0"/>
+                    </a:p>
+                  </a:txBody>
+                  <a:tcPr/>
+                </a:tc>
+                <a:extLst>
+                  <a:ext uri="{0D108BD9-81ED-4DB2-BD59-A6C34878D82A}">
+                    <a16:rowId xmlns:a16="http://schemas.microsoft.com/office/drawing/2014/main" val="110732230"/>
+                  </a:ext>
+                </a:extLst>
+              </a:tr>
+              <a:tr h="373108">
+                <a:tc rowSpan="2">
+                  <a:txBody>
+                    <a:bodyPr/>
+                    <a:lstStyle/>
+                    <a:p>
+                      <a:r>
+                        <a:rPr lang="en-GB" sz="1800" b="1" dirty="0">
+                          <a:latin typeface="Helvetica" pitchFamily="2" charset="0"/>
+                        </a:rPr>
+                        <a:t>Users</a:t>
+                      </a:r>
+                    </a:p>
+                  </a:txBody>
+                  <a:tcPr>
+                    <a:lnL w="12700" cap="flat" cmpd="sng" algn="ctr">
+                      <a:solidFill>
+                        <a:schemeClr val="tx1"/>
+                      </a:solidFill>
+                      <a:prstDash val="solid"/>
+                      <a:round/>
+                      <a:headEnd type="none" w="med" len="med"/>
+                      <a:tailEnd type="none" w="med" len="med"/>
+                    </a:lnL>
+                    <a:lnR w="12700" cap="flat" cmpd="sng" algn="ctr">
+                      <a:solidFill>
+                        <a:schemeClr val="tx1"/>
+                      </a:solidFill>
+                      <a:prstDash val="solid"/>
+                      <a:round/>
+                      <a:headEnd type="none" w="med" len="med"/>
+                      <a:tailEnd type="none" w="med" len="med"/>
+                    </a:lnR>
+                    <a:lnT w="12700" cap="flat" cmpd="sng" algn="ctr">
+                      <a:solidFill>
+                        <a:schemeClr val="tx1"/>
+                      </a:solidFill>
+                      <a:prstDash val="solid"/>
+                      <a:round/>
+                      <a:headEnd type="none" w="med" len="med"/>
+                      <a:tailEnd type="none" w="med" len="med"/>
+                    </a:lnT>
+                    <a:lnB w="12700" cap="flat" cmpd="sng" algn="ctr">
+                      <a:solidFill>
+                        <a:schemeClr val="tx1"/>
+                      </a:solidFill>
+                      <a:prstDash val="solid"/>
+                      <a:round/>
+                      <a:headEnd type="none" w="med" len="med"/>
+                      <a:tailEnd type="none" w="med" len="med"/>
+                    </a:lnB>
+                    <a:lnTlToBr w="12700" cmpd="sng">
+                      <a:noFill/>
+                      <a:prstDash val="solid"/>
+                    </a:lnTlToBr>
+                    <a:lnBlToTr w="12700" cmpd="sng">
+                      <a:noFill/>
+                      <a:prstDash val="solid"/>
+                    </a:lnBlToTr>
+                    <a:solidFill>
+                      <a:schemeClr val="accent4">
+                        <a:lumMod val="40000"/>
+                        <a:lumOff val="60000"/>
+                      </a:schemeClr>
+                    </a:solidFill>
+                  </a:tcPr>
+                </a:tc>
+                <a:tc>
+                  <a:txBody>
+                    <a:bodyPr/>
+                    <a:lstStyle/>
+                    <a:p>
+                      <a:pPr marL="285750" indent="-285750">
+                        <a:buFont typeface="Arial" panose="020B0604020202020204" pitchFamily="34" charset="0"/>
+                        <a:buChar char="•"/>
+                      </a:pPr>
+                      <a:r>
+                        <a:rPr lang="en-GB" sz="1800" dirty="0">
+                          <a:latin typeface="Helvetica" pitchFamily="2" charset="0"/>
+                        </a:rPr>
+                        <a:t>Work to maximise performance</a:t>
+                      </a:r>
+                    </a:p>
+                  </a:txBody>
+                  <a:tcPr>
+                    <a:lnL w="12700" cap="flat" cmpd="sng" algn="ctr">
+                      <a:solidFill>
+                        <a:schemeClr val="tx1"/>
+                      </a:solidFill>
+                      <a:prstDash val="solid"/>
+                      <a:round/>
+                      <a:headEnd type="none" w="med" len="med"/>
+                      <a:tailEnd type="none" w="med" len="med"/>
+                    </a:lnL>
+                    <a:lnR w="12700" cap="flat" cmpd="sng" algn="ctr">
+                      <a:solidFill>
+                        <a:schemeClr val="tx1"/>
+                      </a:solidFill>
+                      <a:prstDash val="solid"/>
+                      <a:round/>
+                      <a:headEnd type="none" w="med" len="med"/>
+                      <a:tailEnd type="none" w="med" len="med"/>
+                    </a:lnR>
+                    <a:lnT w="12700" cap="flat" cmpd="sng" algn="ctr">
+                      <a:solidFill>
+                        <a:schemeClr val="tx1"/>
+                      </a:solidFill>
+                      <a:prstDash val="solid"/>
+                      <a:round/>
+                      <a:headEnd type="none" w="med" len="med"/>
+                      <a:tailEnd type="none" w="med" len="med"/>
+                    </a:lnT>
+                    <a:lnB w="12700" cap="flat" cmpd="sng" algn="ctr">
+                      <a:solidFill>
+                        <a:schemeClr val="tx1"/>
+                      </a:solidFill>
+                      <a:prstDash val="solid"/>
+                      <a:round/>
+                      <a:headEnd type="none" w="med" len="med"/>
+                      <a:tailEnd type="none" w="med" len="med"/>
+                    </a:lnB>
+                    <a:lnTlToBr w="12700" cmpd="sng">
+                      <a:noFill/>
+                      <a:prstDash val="solid"/>
+                    </a:lnTlToBr>
+                    <a:lnBlToTr w="12700" cmpd="sng">
+                      <a:noFill/>
+                      <a:prstDash val="solid"/>
+                    </a:lnBlToTr>
+                    <a:solidFill>
+                      <a:schemeClr val="accent4">
+                        <a:lumMod val="20000"/>
+                        <a:lumOff val="80000"/>
+                      </a:schemeClr>
+                    </a:solidFill>
+                  </a:tcPr>
+                </a:tc>
+                <a:tc>
+                  <a:txBody>
+                    <a:bodyPr/>
+                    <a:lstStyle/>
+                    <a:p>
+                      <a:pPr marL="285750" indent="-285750">
+                        <a:buFont typeface="Arial" panose="020B0604020202020204" pitchFamily="34" charset="0"/>
+                        <a:buChar char="•"/>
+                      </a:pPr>
+                      <a:r>
+                        <a:rPr lang="en-GB" sz="1800" dirty="0">
+                          <a:latin typeface="Helvetica" pitchFamily="2" charset="0"/>
+                        </a:rPr>
+                        <a:t>Work to maximise energy efficiency</a:t>
+                      </a:r>
+                    </a:p>
+                  </a:txBody>
+                  <a:tcPr>
+                    <a:lnL w="12700" cap="flat" cmpd="sng" algn="ctr">
+                      <a:solidFill>
+                        <a:schemeClr val="tx1"/>
+                      </a:solidFill>
+                      <a:prstDash val="solid"/>
+                      <a:round/>
+                      <a:headEnd type="none" w="med" len="med"/>
+                      <a:tailEnd type="none" w="med" len="med"/>
+                    </a:lnL>
+                    <a:lnR w="12700" cap="flat" cmpd="sng" algn="ctr">
+                      <a:solidFill>
+                        <a:schemeClr val="tx1"/>
+                      </a:solidFill>
+                      <a:prstDash val="solid"/>
+                      <a:round/>
+                      <a:headEnd type="none" w="med" len="med"/>
+                      <a:tailEnd type="none" w="med" len="med"/>
+                    </a:lnR>
+                    <a:lnT w="12700" cap="flat" cmpd="sng" algn="ctr">
+                      <a:solidFill>
+                        <a:schemeClr val="tx1"/>
+                      </a:solidFill>
+                      <a:prstDash val="solid"/>
+                      <a:round/>
+                      <a:headEnd type="none" w="med" len="med"/>
+                      <a:tailEnd type="none" w="med" len="med"/>
+                    </a:lnT>
+                    <a:lnB w="12700" cap="flat" cmpd="sng" algn="ctr">
+                      <a:solidFill>
+                        <a:schemeClr val="tx1"/>
+                      </a:solidFill>
+                      <a:prstDash val="solid"/>
+                      <a:round/>
+                      <a:headEnd type="none" w="med" len="med"/>
+                      <a:tailEnd type="none" w="med" len="med"/>
+                    </a:lnB>
+                    <a:lnTlToBr w="12700" cmpd="sng">
+                      <a:noFill/>
+                      <a:prstDash val="solid"/>
+                    </a:lnTlToBr>
+                    <a:lnBlToTr w="12700" cmpd="sng">
+                      <a:noFill/>
+                      <a:prstDash val="solid"/>
+                    </a:lnBlToTr>
+                    <a:solidFill>
+                      <a:schemeClr val="accent4">
+                        <a:lumMod val="20000"/>
+                        <a:lumOff val="80000"/>
+                      </a:schemeClr>
+                    </a:solidFill>
+                  </a:tcPr>
+                </a:tc>
+                <a:extLst>
+                  <a:ext uri="{0D108BD9-81ED-4DB2-BD59-A6C34878D82A}">
+                    <a16:rowId xmlns:a16="http://schemas.microsoft.com/office/drawing/2014/main" val="679836782"/>
+                  </a:ext>
+                </a:extLst>
+              </a:tr>
+              <a:tr h="373108">
+                <a:tc vMerge="1">
+                  <a:txBody>
+                    <a:bodyPr/>
+                    <a:lstStyle/>
+                    <a:p>
+                      <a:endParaRPr lang="en-GB" sz="1800" b="1" dirty="0"/>
+                    </a:p>
+                  </a:txBody>
+                  <a:tcPr>
+                    <a:lnL w="12700" cap="flat" cmpd="sng" algn="ctr">
+                      <a:solidFill>
+                        <a:schemeClr val="tx1"/>
+                      </a:solidFill>
+                      <a:prstDash val="solid"/>
+                      <a:round/>
+                      <a:headEnd type="none" w="med" len="med"/>
+                      <a:tailEnd type="none" w="med" len="med"/>
+                    </a:lnL>
+                    <a:lnR w="12700" cap="flat" cmpd="sng" algn="ctr">
+                      <a:solidFill>
+                        <a:schemeClr val="tx1"/>
+                      </a:solidFill>
+                      <a:prstDash val="solid"/>
+                      <a:round/>
+                      <a:headEnd type="none" w="med" len="med"/>
+                      <a:tailEnd type="none" w="med" len="med"/>
+                    </a:lnR>
+                    <a:lnT w="12700" cap="flat" cmpd="sng" algn="ctr">
+                      <a:solidFill>
+                        <a:schemeClr val="tx1"/>
+                      </a:solidFill>
+                      <a:prstDash val="solid"/>
+                      <a:round/>
+                      <a:headEnd type="none" w="med" len="med"/>
+                      <a:tailEnd type="none" w="med" len="med"/>
+                    </a:lnT>
+                    <a:lnB w="12700" cap="flat" cmpd="sng" algn="ctr">
+                      <a:solidFill>
+                        <a:schemeClr val="tx1"/>
+                      </a:solidFill>
+                      <a:prstDash val="solid"/>
+                      <a:round/>
+                      <a:headEnd type="none" w="med" len="med"/>
+                      <a:tailEnd type="none" w="med" len="med"/>
+                    </a:lnB>
+                    <a:lnTlToBr w="12700" cmpd="sng">
+                      <a:noFill/>
+                      <a:prstDash val="solid"/>
+                    </a:lnTlToBr>
+                    <a:lnBlToTr w="12700" cmpd="sng">
+                      <a:noFill/>
+                      <a:prstDash val="solid"/>
+                    </a:lnBlToTr>
+                    <a:solidFill>
+                      <a:schemeClr val="accent4">
+                        <a:lumMod val="40000"/>
+                        <a:lumOff val="60000"/>
+                      </a:schemeClr>
+                    </a:solidFill>
+                  </a:tcPr>
+                </a:tc>
+                <a:tc gridSpan="2">
+                  <a:txBody>
+                    <a:bodyPr/>
+                    <a:lstStyle/>
+                    <a:p>
+                      <a:pPr marL="285750" indent="-285750">
+                        <a:buFont typeface="Arial" panose="020B0604020202020204" pitchFamily="34" charset="0"/>
+                        <a:buChar char="•"/>
+                      </a:pPr>
+                      <a:r>
+                        <a:rPr lang="en-GB" sz="1800" dirty="0">
+                          <a:latin typeface="Helvetica" pitchFamily="2" charset="0"/>
+                        </a:rPr>
+                        <a:t>Use the minimum amount of resource possible for the proposed work</a:t>
+                      </a:r>
+                    </a:p>
+                    <a:p>
+                      <a:pPr marL="285750" indent="-285750">
+                        <a:buFont typeface="Arial" panose="020B0604020202020204" pitchFamily="34" charset="0"/>
+                        <a:buChar char="•"/>
+                      </a:pPr>
+                      <a:r>
+                        <a:rPr lang="en-GB" sz="1800" dirty="0">
+                          <a:latin typeface="Helvetica" pitchFamily="2" charset="0"/>
+                        </a:rPr>
+                        <a:t>Make datasets FAIR to avoid replication and maximise re-use</a:t>
+                      </a:r>
+                    </a:p>
+                    <a:p>
+                      <a:pPr marL="285750" indent="-285750">
+                        <a:buFont typeface="Arial" panose="020B0604020202020204" pitchFamily="34" charset="0"/>
+                        <a:buChar char="•"/>
+                      </a:pPr>
+                      <a:r>
+                        <a:rPr lang="en-GB" sz="1800" dirty="0">
+                          <a:latin typeface="Helvetica" pitchFamily="2" charset="0"/>
+                        </a:rPr>
+                        <a:t>Produce </a:t>
+                      </a:r>
+                      <a:r>
+                        <a:rPr lang="en-GB" sz="1800">
+                          <a:latin typeface="Helvetica" pitchFamily="2" charset="0"/>
+                        </a:rPr>
+                        <a:t>a </a:t>
+                      </a:r>
+                      <a:r>
+                        <a:rPr lang="en-GB" sz="1800" i="1">
+                          <a:latin typeface="Helvetica" pitchFamily="2" charset="0"/>
+                        </a:rPr>
+                        <a:t>Responsible Computing </a:t>
+                      </a:r>
+                      <a:r>
+                        <a:rPr lang="en-GB" sz="1800" i="1" dirty="0">
+                          <a:latin typeface="Helvetica" pitchFamily="2" charset="0"/>
+                        </a:rPr>
+                        <a:t>P</a:t>
+                      </a:r>
+                      <a:r>
+                        <a:rPr lang="en-GB" sz="1800" i="1">
+                          <a:latin typeface="Helvetica" pitchFamily="2" charset="0"/>
+                        </a:rPr>
+                        <a:t>lan </a:t>
+                      </a:r>
+                      <a:r>
+                        <a:rPr lang="en-GB" sz="1800" dirty="0">
+                          <a:latin typeface="Helvetica" pitchFamily="2" charset="0"/>
+                        </a:rPr>
+                        <a:t>for use of HPC systems</a:t>
+                      </a:r>
+                    </a:p>
+                  </a:txBody>
+                  <a:tcPr>
+                    <a:lnL w="12700" cap="flat" cmpd="sng" algn="ctr">
+                      <a:solidFill>
+                        <a:schemeClr val="tx1"/>
+                      </a:solidFill>
+                      <a:prstDash val="solid"/>
+                      <a:round/>
+                      <a:headEnd type="none" w="med" len="med"/>
+                      <a:tailEnd type="none" w="med" len="med"/>
+                    </a:lnL>
+                    <a:lnR w="12700" cap="flat" cmpd="sng" algn="ctr">
+                      <a:solidFill>
+                        <a:schemeClr val="tx1"/>
+                      </a:solidFill>
+                      <a:prstDash val="solid"/>
+                      <a:round/>
+                      <a:headEnd type="none" w="med" len="med"/>
+                      <a:tailEnd type="none" w="med" len="med"/>
+                    </a:lnR>
+                    <a:lnT w="12700" cap="flat" cmpd="sng" algn="ctr">
+                      <a:solidFill>
+                        <a:schemeClr val="tx1"/>
+                      </a:solidFill>
+                      <a:prstDash val="solid"/>
+                      <a:round/>
+                      <a:headEnd type="none" w="med" len="med"/>
+                      <a:tailEnd type="none" w="med" len="med"/>
+                    </a:lnT>
+                    <a:lnB w="12700" cap="flat" cmpd="sng" algn="ctr">
+                      <a:solidFill>
+                        <a:schemeClr val="tx1"/>
+                      </a:solidFill>
+                      <a:prstDash val="solid"/>
+                      <a:round/>
+                      <a:headEnd type="none" w="med" len="med"/>
+                      <a:tailEnd type="none" w="med" len="med"/>
+                    </a:lnB>
+                    <a:lnTlToBr w="12700" cmpd="sng">
+                      <a:noFill/>
+                      <a:prstDash val="solid"/>
+                    </a:lnTlToBr>
+                    <a:lnBlToTr w="12700" cmpd="sng">
+                      <a:noFill/>
+                      <a:prstDash val="solid"/>
+                    </a:lnBlToTr>
+                    <a:solidFill>
+                      <a:schemeClr val="accent4">
+                        <a:lumMod val="20000"/>
+                        <a:lumOff val="80000"/>
+                      </a:schemeClr>
+                    </a:solidFill>
+                  </a:tcPr>
+                </a:tc>
+                <a:tc hMerge="1">
+                  <a:txBody>
+                    <a:bodyPr/>
+                    <a:lstStyle/>
+                    <a:p>
+                      <a:endParaRPr lang="en-GB" sz="1400" dirty="0"/>
+                    </a:p>
+                  </a:txBody>
+                  <a:tcPr/>
+                </a:tc>
+                <a:extLst>
+                  <a:ext uri="{0D108BD9-81ED-4DB2-BD59-A6C34878D82A}">
+                    <a16:rowId xmlns:a16="http://schemas.microsoft.com/office/drawing/2014/main" val="540823525"/>
+                  </a:ext>
+                </a:extLst>
+              </a:tr>
+            </a:tbl>
+          </a:graphicData>
+        </a:graphic>
+      </p:graphicFrame>
+    </p:spTree>
+    <p:extLst>
+      <p:ext uri="{BB962C8B-B14F-4D97-AF65-F5344CB8AC3E}">
+        <p14:creationId xmlns:p14="http://schemas.microsoft.com/office/powerpoint/2010/main" val="2816786044"/>
+      </p:ext>
+    </p:extLst>
+  </p:cSld>
+  <p:clrMapOvr>
+    <a:masterClrMapping/>
+  </p:clrMapOvr>
+</p:sld>
+</file>
+
+<file path=ppt/slides/slide22.xml><?xml version="1.0" encoding="utf-8"?>
+<p:sld xmlns:a="http://schemas.openxmlformats.org/drawingml/2006/main" xmlns:r="http://schemas.openxmlformats.org/officeDocument/2006/relationships" xmlns:p="http://schemas.openxmlformats.org/presentationml/2006/main">
+  <p:cSld>
+    <p:spTree>
+      <p:nvGrpSpPr>
+        <p:cNvPr id="1" name=""/>
+        <p:cNvGrpSpPr/>
+        <p:nvPr/>
+      </p:nvGrpSpPr>
+      <p:grpSpPr>
+        <a:xfrm>
+          <a:off x="0" y="0"/>
+          <a:ext cx="0" cy="0"/>
+          <a:chOff x="0" y="0"/>
+          <a:chExt cx="0" cy="0"/>
+        </a:xfrm>
+      </p:grpSpPr>
       <p:sp>
         <p:nvSpPr>
           <p:cNvPr id="2" name="Title 1">
@@ -5431,10 +7135,7 @@
                 <a:pPr/>
                 <a14:m>
                   <m:oMathPara xmlns:m="http://schemas.openxmlformats.org/officeDocument/2006/math">
-                    <m:oMathParaPr>
-                      <m:jc m:val="centerGroup"/>
-                    </m:oMathParaPr>
-                    <m:oMath xmlns:m="http://schemas.openxmlformats.org/officeDocument/2006/math">
+                    <m:oMath>
                       <m:r>
                         <m:rPr>
                           <m:nor/>
@@ -5442,25 +7143,7 @@
                         <a:rPr lang="en-GB" sz="2400" b="0" i="1" smtClean="0">
                           <a:latin typeface="Cambria Math" panose="02040503050406030204" pitchFamily="18" charset="0"/>
                         </a:rPr>
-                        <m:t>HPC</m:t>
-                      </m:r>
-                      <m:r>
-                        <m:rPr>
-                          <m:nor/>
-                        </m:rPr>
-                        <a:rPr lang="en-GB" sz="2400" b="0" i="1" smtClean="0">
-                          <a:latin typeface="Cambria Math" panose="02040503050406030204" pitchFamily="18" charset="0"/>
-                        </a:rPr>
-                        <m:t>−</m:t>
-                      </m:r>
-                      <m:r>
-                        <m:rPr>
-                          <m:nor/>
-                        </m:rPr>
-                        <a:rPr lang="en-GB" sz="2400" b="0" i="1" smtClean="0">
-                          <a:latin typeface="Cambria Math" panose="02040503050406030204" pitchFamily="18" charset="0"/>
-                        </a:rPr>
-                        <m:t>CI</m:t>
+                        <m:t>HPC−CI</m:t>
                       </m:r>
                       <m:r>
                         <a:rPr lang="en-GB" sz="2400" b="0" i="1" smtClean="0">
@@ -5471,7 +7154,7 @@
                       <m:f>
                         <m:fPr>
                           <m:ctrlPr>
-                            <a:rPr lang="en-GB" sz="2400" b="0" i="1" smtClean="0">
+                            <a:rPr lang="en-GB" sz="2400" i="1">
                               <a:latin typeface="Cambria Math" panose="02040503050406030204" pitchFamily="18" charset="0"/>
                             </a:rPr>
                           </m:ctrlPr>
@@ -5597,7 +7280,7 @@
 </p:sld>
 </file>
 
-<file path=ppt/slides/slide22.xml><?xml version="1.0" encoding="utf-8"?>
+<file path=ppt/slides/slide23.xml><?xml version="1.0" encoding="utf-8"?>
 <p:sld xmlns:a="http://schemas.openxmlformats.org/drawingml/2006/main" xmlns:r="http://schemas.openxmlformats.org/officeDocument/2006/relationships" xmlns:p="http://schemas.openxmlformats.org/presentationml/2006/main">
   <p:cSld>
     <p:spTree>
@@ -6033,10 +7716,7 @@
                 <a:pPr/>
                 <a14:m>
                   <m:oMathPara xmlns:m="http://schemas.openxmlformats.org/officeDocument/2006/math">
-                    <m:oMathParaPr>
-                      <m:jc m:val="centerGroup"/>
-                    </m:oMathParaPr>
-                    <m:oMath xmlns:m="http://schemas.openxmlformats.org/officeDocument/2006/math">
+                    <m:oMath>
                       <m:r>
                         <m:rPr>
                           <m:nor/>
@@ -6044,25 +7724,7 @@
                         <a:rPr lang="en-GB" sz="2400" b="0" i="1" smtClean="0">
                           <a:latin typeface="Cambria Math" panose="02040503050406030204" pitchFamily="18" charset="0"/>
                         </a:rPr>
-                        <m:t>HPC</m:t>
-                      </m:r>
-                      <m:r>
-                        <m:rPr>
-                          <m:nor/>
-                        </m:rPr>
-                        <a:rPr lang="en-GB" sz="2400" b="0" i="1" smtClean="0">
-                          <a:latin typeface="Cambria Math" panose="02040503050406030204" pitchFamily="18" charset="0"/>
-                        </a:rPr>
-                        <m:t>−</m:t>
-                      </m:r>
-                      <m:r>
-                        <m:rPr>
-                          <m:nor/>
-                        </m:rPr>
-                        <a:rPr lang="en-GB" sz="2400" b="0" i="1" smtClean="0">
-                          <a:latin typeface="Cambria Math" panose="02040503050406030204" pitchFamily="18" charset="0"/>
-                        </a:rPr>
-                        <m:t>CI</m:t>
+                        <m:t>HPC−CI</m:t>
                       </m:r>
                       <m:r>
                         <a:rPr lang="en-GB" sz="2400" b="0" i="1" smtClean="0">
@@ -6073,7 +7735,7 @@
                       <m:f>
                         <m:fPr>
                           <m:ctrlPr>
-                            <a:rPr lang="en-GB" sz="2400" b="0" i="1" smtClean="0">
+                            <a:rPr lang="en-GB" sz="2400" i="1">
                               <a:latin typeface="Cambria Math" panose="02040503050406030204" pitchFamily="18" charset="0"/>
                             </a:rPr>
                           </m:ctrlPr>
@@ -6199,7 +7861,7 @@
 </p:sld>
 </file>
 
-<file path=ppt/slides/slide23.xml><?xml version="1.0" encoding="utf-8"?>
+<file path=ppt/slides/slide24.xml><?xml version="1.0" encoding="utf-8"?>
 <p:sld xmlns:a="http://schemas.openxmlformats.org/drawingml/2006/main" xmlns:r="http://schemas.openxmlformats.org/officeDocument/2006/relationships" xmlns:p="http://schemas.openxmlformats.org/presentationml/2006/main">
   <p:cSld>
     <p:spTree>
